--- a/Projet Master Presentation-FR.pptx
+++ b/Projet Master Presentation-FR.pptx
@@ -9405,7 +9405,7 @@
         <p:spPr>
           <a:xfrm>
             <a:off x="6690357" y="3399051"/>
-            <a:ext cx="5553894" cy="3117135"/>
+            <a:ext cx="5553894" cy="2678554"/>
           </a:xfrm>
           <a:prstGeom prst="rect">
             <a:avLst/>
@@ -9450,7 +9450,7 @@
                 </a:solidFill>
                 <a:latin typeface="Avenir Heavy" panose="020B0703020203020204" pitchFamily="34" charset="0"/>
               </a:rPr>
-              <a:t>ML stack: ML.NET (Microsoft.ML, </a:t>
+              <a:t>ML stack: ML.NET (</a:t>
             </a:r>
             <a:r>
               <a:rPr lang="en-US" sz="1900" dirty="0" err="1">
@@ -9459,7 +9459,7 @@
                 </a:solidFill>
                 <a:latin typeface="Avenir Heavy" panose="020B0703020203020204" pitchFamily="34" charset="0"/>
               </a:rPr>
-              <a:t>FastTree</a:t>
+              <a:t>LightGBM</a:t>
             </a:r>
             <a:r>
               <a:rPr lang="en-US" sz="1900" dirty="0">
@@ -9468,25 +9468,7 @@
                 </a:solidFill>
                 <a:latin typeface="Avenir Heavy" panose="020B0703020203020204" pitchFamily="34" charset="0"/>
               </a:rPr>
-              <a:t>, </a:t>
-            </a:r>
-            <a:r>
-              <a:rPr lang="en-US" sz="1900" dirty="0" err="1">
-                <a:solidFill>
-                  <a:schemeClr val="bg1"/>
-                </a:solidFill>
-                <a:latin typeface="Avenir Heavy" panose="020B0703020203020204" pitchFamily="34" charset="0"/>
-              </a:rPr>
-              <a:t>LightGBM</a:t>
-            </a:r>
-            <a:r>
-              <a:rPr lang="en-US" sz="1900" dirty="0">
-                <a:solidFill>
-                  <a:schemeClr val="bg1"/>
-                </a:solidFill>
-                <a:latin typeface="Avenir Heavy" panose="020B0703020203020204" pitchFamily="34" charset="0"/>
-              </a:rPr>
-              <a:t>) + ONNX Runtime + </a:t>
+              <a:t>) + </a:t>
             </a:r>
             <a:r>
               <a:rPr lang="en-US" sz="1900" dirty="0" err="1">
@@ -9519,23 +9501,8 @@
                 </a:solidFill>
                 <a:latin typeface="Avenir Heavy" panose="020B0703020203020204" pitchFamily="34" charset="0"/>
               </a:rPr>
-              <a:t>API docs: Swagger / </a:t>
-            </a:r>
-            <a:r>
-              <a:rPr lang="en-US" sz="1900" dirty="0" err="1">
-                <a:solidFill>
-                  <a:schemeClr val="bg1"/>
-                </a:solidFill>
-                <a:latin typeface="Avenir Heavy" panose="020B0703020203020204" pitchFamily="34" charset="0"/>
-              </a:rPr>
-              <a:t>OpenAPI</a:t>
-            </a:r>
-            <a:endParaRPr lang="en-US" sz="1900" dirty="0">
-              <a:solidFill>
-                <a:schemeClr val="bg1"/>
-              </a:solidFill>
-              <a:latin typeface="Avenir Heavy" panose="020B0703020203020204" pitchFamily="34" charset="0"/>
-            </a:endParaRPr>
+              <a:t>API docs: Swagger</a:t>
+            </a:r>
           </a:p>
           <a:p>
             <a:pPr marL="252000" indent="-285750">
